--- a/data-eng/decks/w2d4s0.pptx
+++ b/data-eng/decks/w2d4s0.pptx
@@ -4784,7 +4784,7 @@
                 <a:ea typeface="Pretendard"/>
                 <a:cs typeface="Pretendard"/>
               </a:rPr>
-              <a:t>1 Docker 켜짐</a:t>
+              <a:t>1. Docker 켜짐</a:t>
             </a:r>
           </a:p>
         </p:txBody>
@@ -4930,7 +4930,7 @@
                 <a:ea typeface="Pretendard"/>
                 <a:cs typeface="Pretendard"/>
               </a:rPr>
-              <a:t>2 켜고 기다리기</a:t>
+              <a:t>2. 켜고 기다리기</a:t>
             </a:r>
           </a:p>
         </p:txBody>
@@ -5076,7 +5076,7 @@
                 <a:ea typeface="Pretendard"/>
                 <a:cs typeface="Pretendard"/>
               </a:rPr>
-              <a:t>3 접속·표 상태</a:t>
+              <a:t>3. 접속·표 상태</a:t>
             </a:r>
           </a:p>
         </p:txBody>
@@ -5222,7 +5222,7 @@
                 <a:ea typeface="Pretendard"/>
                 <a:cs typeface="Pretendard"/>
               </a:rPr>
-              <a:t>4 재설정</a:t>
+              <a:t>4. 재설정</a:t>
             </a:r>
           </a:p>
         </p:txBody>
